--- a/산출물/스탠드업발표/LLM 다대다 모의면접 시스템_ 6주차 스탠드업.pptx
+++ b/산출물/스탠드업발표/LLM 다대다 모의면접 시스템_ 6주차 스탠드업.pptx
@@ -1312,7 +1312,7 @@
   <p:cSld>
     <p:spTree>
       <p:nvGrpSpPr>
-        <p:cNvPr id="247" name="Shape 247"/>
+        <p:cNvPr id="245" name="Shape 245"/>
         <p:cNvGrpSpPr/>
         <p:nvPr/>
       </p:nvGrpSpPr>
@@ -1326,7 +1326,7 @@
       </p:grpSpPr>
       <p:sp>
         <p:nvSpPr>
-          <p:cNvPr id="248" name="Google Shape;248;p8:notes"/>
+          <p:cNvPr id="246" name="Google Shape;246;p8:notes"/>
           <p:cNvSpPr/>
           <p:nvPr>
             <p:ph idx="2" type="sldImg"/>
@@ -1371,7 +1371,7 @@
       </p:sp>
       <p:sp>
         <p:nvSpPr>
-          <p:cNvPr id="249" name="Google Shape;249;p8:notes"/>
+          <p:cNvPr id="247" name="Google Shape;247;p8:notes"/>
           <p:cNvSpPr txBox="1"/>
           <p:nvPr>
             <p:ph idx="1" type="body"/>
@@ -1414,7 +1414,7 @@
       </p:sp>
       <p:sp>
         <p:nvSpPr>
-          <p:cNvPr id="250" name="Google Shape;250;p8:notes"/>
+          <p:cNvPr id="248" name="Google Shape;248;p8:notes"/>
           <p:cNvSpPr txBox="1"/>
           <p:nvPr>
             <p:ph idx="12" type="sldNum"/>
@@ -1469,7 +1469,7 @@
   <p:cSld>
     <p:spTree>
       <p:nvGrpSpPr>
-        <p:cNvPr id="278" name="Shape 278"/>
+        <p:cNvPr id="276" name="Shape 276"/>
         <p:cNvGrpSpPr/>
         <p:nvPr/>
       </p:nvGrpSpPr>
@@ -1483,7 +1483,7 @@
       </p:grpSpPr>
       <p:sp>
         <p:nvSpPr>
-          <p:cNvPr id="279" name="Google Shape;279;p9:notes"/>
+          <p:cNvPr id="277" name="Google Shape;277;p9:notes"/>
           <p:cNvSpPr/>
           <p:nvPr>
             <p:ph idx="2" type="sldImg"/>
@@ -1528,7 +1528,7 @@
       </p:sp>
       <p:sp>
         <p:nvSpPr>
-          <p:cNvPr id="280" name="Google Shape;280;p9:notes"/>
+          <p:cNvPr id="278" name="Google Shape;278;p9:notes"/>
           <p:cNvSpPr txBox="1"/>
           <p:nvPr>
             <p:ph idx="1" type="body"/>
@@ -1571,7 +1571,7 @@
       </p:sp>
       <p:sp>
         <p:nvSpPr>
-          <p:cNvPr id="281" name="Google Shape;281;p9:notes"/>
+          <p:cNvPr id="279" name="Google Shape;279;p9:notes"/>
           <p:cNvSpPr txBox="1"/>
           <p:nvPr>
             <p:ph idx="12" type="sldNum"/>
@@ -1626,7 +1626,7 @@
   <p:cSld>
     <p:spTree>
       <p:nvGrpSpPr>
-        <p:cNvPr id="304" name="Shape 304"/>
+        <p:cNvPr id="302" name="Shape 302"/>
         <p:cNvGrpSpPr/>
         <p:nvPr/>
       </p:nvGrpSpPr>
@@ -1640,7 +1640,7 @@
       </p:grpSpPr>
       <p:sp>
         <p:nvSpPr>
-          <p:cNvPr id="305" name="Google Shape;305;p10:notes"/>
+          <p:cNvPr id="303" name="Google Shape;303;p10:notes"/>
           <p:cNvSpPr/>
           <p:nvPr>
             <p:ph idx="2" type="sldImg"/>
@@ -1685,7 +1685,7 @@
       </p:sp>
       <p:sp>
         <p:nvSpPr>
-          <p:cNvPr id="306" name="Google Shape;306;p10:notes"/>
+          <p:cNvPr id="304" name="Google Shape;304;p10:notes"/>
           <p:cNvSpPr txBox="1"/>
           <p:nvPr>
             <p:ph idx="1" type="body"/>
@@ -1728,7 +1728,7 @@
       </p:sp>
       <p:sp>
         <p:nvSpPr>
-          <p:cNvPr id="307" name="Google Shape;307;p10:notes"/>
+          <p:cNvPr id="305" name="Google Shape;305;p10:notes"/>
           <p:cNvSpPr txBox="1"/>
           <p:nvPr>
             <p:ph idx="12" type="sldNum"/>
@@ -1783,7 +1783,7 @@
   <p:cSld>
     <p:spTree>
       <p:nvGrpSpPr>
-        <p:cNvPr id="325" name="Shape 325"/>
+        <p:cNvPr id="323" name="Shape 323"/>
         <p:cNvGrpSpPr/>
         <p:nvPr/>
       </p:nvGrpSpPr>
@@ -1797,7 +1797,7 @@
       </p:grpSpPr>
       <p:sp>
         <p:nvSpPr>
-          <p:cNvPr id="326" name="Google Shape;326;g372b545b64b_0_107:notes"/>
+          <p:cNvPr id="324" name="Google Shape;324;g372b545b64b_0_107:notes"/>
           <p:cNvSpPr txBox="1"/>
           <p:nvPr>
             <p:ph idx="1" type="body"/>
@@ -1836,7 +1836,7 @@
       </p:sp>
       <p:sp>
         <p:nvSpPr>
-          <p:cNvPr id="327" name="Google Shape;327;g372b545b64b_0_107:notes"/>
+          <p:cNvPr id="325" name="Google Shape;325;g372b545b64b_0_107:notes"/>
           <p:cNvSpPr/>
           <p:nvPr>
             <p:ph idx="2" type="sldImg"/>
@@ -6056,7 +6056,7 @@
   <p:cSld>
     <p:spTree>
       <p:nvGrpSpPr>
-        <p:cNvPr id="251" name="Shape 251"/>
+        <p:cNvPr id="249" name="Shape 249"/>
         <p:cNvGrpSpPr/>
         <p:nvPr/>
       </p:nvGrpSpPr>
@@ -6070,7 +6070,7 @@
       </p:grpSpPr>
       <p:sp>
         <p:nvSpPr>
-          <p:cNvPr id="252" name="Google Shape;252;p23"/>
+          <p:cNvPr id="250" name="Google Shape;250;p23"/>
           <p:cNvSpPr/>
           <p:nvPr/>
         </p:nvSpPr>
@@ -6128,7 +6128,7 @@
       </p:sp>
       <p:sp>
         <p:nvSpPr>
-          <p:cNvPr id="253" name="Google Shape;253;p23"/>
+          <p:cNvPr id="251" name="Google Shape;251;p23"/>
           <p:cNvSpPr/>
           <p:nvPr/>
         </p:nvSpPr>
@@ -6179,7 +6179,7 @@
       </p:sp>
       <p:sp>
         <p:nvSpPr>
-          <p:cNvPr id="254" name="Google Shape;254;p23"/>
+          <p:cNvPr id="252" name="Google Shape;252;p23"/>
           <p:cNvSpPr/>
           <p:nvPr/>
         </p:nvSpPr>
@@ -6237,7 +6237,7 @@
       </p:sp>
       <p:sp>
         <p:nvSpPr>
-          <p:cNvPr id="255" name="Google Shape;255;p23"/>
+          <p:cNvPr id="253" name="Google Shape;253;p23"/>
           <p:cNvSpPr/>
           <p:nvPr/>
         </p:nvSpPr>
@@ -6295,7 +6295,7 @@
       </p:sp>
       <p:sp>
         <p:nvSpPr>
-          <p:cNvPr id="256" name="Google Shape;256;p23"/>
+          <p:cNvPr id="254" name="Google Shape;254;p23"/>
           <p:cNvSpPr/>
           <p:nvPr/>
         </p:nvSpPr>
@@ -6353,7 +6353,7 @@
       </p:sp>
       <p:sp>
         <p:nvSpPr>
-          <p:cNvPr id="257" name="Google Shape;257;p23"/>
+          <p:cNvPr id="255" name="Google Shape;255;p23"/>
           <p:cNvSpPr/>
           <p:nvPr/>
         </p:nvSpPr>
@@ -6411,7 +6411,7 @@
       </p:sp>
       <p:sp>
         <p:nvSpPr>
-          <p:cNvPr id="258" name="Google Shape;258;p23"/>
+          <p:cNvPr id="256" name="Google Shape;256;p23"/>
           <p:cNvSpPr/>
           <p:nvPr/>
         </p:nvSpPr>
@@ -6469,7 +6469,7 @@
       </p:sp>
       <p:sp>
         <p:nvSpPr>
-          <p:cNvPr id="259" name="Google Shape;259;p23"/>
+          <p:cNvPr id="257" name="Google Shape;257;p23"/>
           <p:cNvSpPr/>
           <p:nvPr/>
         </p:nvSpPr>
@@ -6520,7 +6520,7 @@
       </p:sp>
       <p:sp>
         <p:nvSpPr>
-          <p:cNvPr id="260" name="Google Shape;260;p23"/>
+          <p:cNvPr id="258" name="Google Shape;258;p23"/>
           <p:cNvSpPr/>
           <p:nvPr/>
         </p:nvSpPr>
@@ -6578,7 +6578,7 @@
       </p:sp>
       <p:sp>
         <p:nvSpPr>
-          <p:cNvPr id="261" name="Google Shape;261;p23"/>
+          <p:cNvPr id="259" name="Google Shape;259;p23"/>
           <p:cNvSpPr/>
           <p:nvPr/>
         </p:nvSpPr>
@@ -6636,7 +6636,7 @@
       </p:sp>
       <p:sp>
         <p:nvSpPr>
-          <p:cNvPr id="262" name="Google Shape;262;p23"/>
+          <p:cNvPr id="260" name="Google Shape;260;p23"/>
           <p:cNvSpPr/>
           <p:nvPr/>
         </p:nvSpPr>
@@ -6694,7 +6694,7 @@
       </p:sp>
       <p:sp>
         <p:nvSpPr>
-          <p:cNvPr id="263" name="Google Shape;263;p23"/>
+          <p:cNvPr id="261" name="Google Shape;261;p23"/>
           <p:cNvSpPr/>
           <p:nvPr/>
         </p:nvSpPr>
@@ -6752,7 +6752,7 @@
       </p:sp>
       <p:sp>
         <p:nvSpPr>
-          <p:cNvPr id="264" name="Google Shape;264;p23"/>
+          <p:cNvPr id="262" name="Google Shape;262;p23"/>
           <p:cNvSpPr/>
           <p:nvPr/>
         </p:nvSpPr>
@@ -6810,7 +6810,7 @@
       </p:sp>
       <p:sp>
         <p:nvSpPr>
-          <p:cNvPr id="265" name="Google Shape;265;p23"/>
+          <p:cNvPr id="263" name="Google Shape;263;p23"/>
           <p:cNvSpPr/>
           <p:nvPr/>
         </p:nvSpPr>
@@ -6861,7 +6861,7 @@
       </p:sp>
       <p:sp>
         <p:nvSpPr>
-          <p:cNvPr id="266" name="Google Shape;266;p23"/>
+          <p:cNvPr id="264" name="Google Shape;264;p23"/>
           <p:cNvSpPr/>
           <p:nvPr/>
         </p:nvSpPr>
@@ -6919,7 +6919,7 @@
       </p:sp>
       <p:sp>
         <p:nvSpPr>
-          <p:cNvPr id="267" name="Google Shape;267;p23"/>
+          <p:cNvPr id="265" name="Google Shape;265;p23"/>
           <p:cNvSpPr/>
           <p:nvPr/>
         </p:nvSpPr>
@@ -6977,7 +6977,7 @@
       </p:sp>
       <p:sp>
         <p:nvSpPr>
-          <p:cNvPr id="268" name="Google Shape;268;p23"/>
+          <p:cNvPr id="266" name="Google Shape;266;p23"/>
           <p:cNvSpPr/>
           <p:nvPr/>
         </p:nvSpPr>
@@ -7035,7 +7035,7 @@
       </p:sp>
       <p:sp>
         <p:nvSpPr>
-          <p:cNvPr id="269" name="Google Shape;269;p23"/>
+          <p:cNvPr id="267" name="Google Shape;267;p23"/>
           <p:cNvSpPr/>
           <p:nvPr/>
         </p:nvSpPr>
@@ -7093,7 +7093,7 @@
       </p:sp>
       <p:sp>
         <p:nvSpPr>
-          <p:cNvPr id="270" name="Google Shape;270;p23"/>
+          <p:cNvPr id="268" name="Google Shape;268;p23"/>
           <p:cNvSpPr/>
           <p:nvPr/>
         </p:nvSpPr>
@@ -7151,7 +7151,7 @@
       </p:sp>
       <p:sp>
         <p:nvSpPr>
-          <p:cNvPr id="271" name="Google Shape;271;p23"/>
+          <p:cNvPr id="269" name="Google Shape;269;p23"/>
           <p:cNvSpPr/>
           <p:nvPr/>
         </p:nvSpPr>
@@ -7200,7 +7200,7 @@
       </p:sp>
       <p:sp>
         <p:nvSpPr>
-          <p:cNvPr id="272" name="Google Shape;272;p23"/>
+          <p:cNvPr id="270" name="Google Shape;270;p23"/>
           <p:cNvSpPr/>
           <p:nvPr/>
         </p:nvSpPr>
@@ -7243,7 +7243,7 @@
       </p:sp>
       <p:pic>
         <p:nvPicPr>
-          <p:cNvPr descr="D-171] 공부 끝 - 오르비" id="273" name="Google Shape;273;p23"/>
+          <p:cNvPr descr="D-171] 공부 끝 - 오르비" id="271" name="Google Shape;271;p23"/>
           <p:cNvPicPr preferRelativeResize="0"/>
           <p:nvPr/>
         </p:nvPicPr>
@@ -7270,7 +7270,7 @@
       </p:pic>
       <p:pic>
         <p:nvPicPr>
-          <p:cNvPr id="274" name="Google Shape;274;p23"/>
+          <p:cNvPr id="272" name="Google Shape;272;p23"/>
           <p:cNvPicPr preferRelativeResize="0"/>
           <p:nvPr/>
         </p:nvPicPr>
@@ -7297,7 +7297,7 @@
       </p:pic>
       <p:pic>
         <p:nvPicPr>
-          <p:cNvPr id="275" name="Google Shape;275;p23"/>
+          <p:cNvPr id="273" name="Google Shape;273;p23"/>
           <p:cNvPicPr preferRelativeResize="0"/>
           <p:nvPr/>
         </p:nvPicPr>
@@ -7324,7 +7324,7 @@
       </p:pic>
       <p:sp>
         <p:nvSpPr>
-          <p:cNvPr id="276" name="Google Shape;276;p23"/>
+          <p:cNvPr id="274" name="Google Shape;274;p23"/>
           <p:cNvSpPr/>
           <p:nvPr/>
         </p:nvSpPr>
@@ -7386,7 +7386,7 @@
       </p:sp>
       <p:sp>
         <p:nvSpPr>
-          <p:cNvPr id="277" name="Google Shape;277;p23"/>
+          <p:cNvPr id="275" name="Google Shape;275;p23"/>
           <p:cNvSpPr/>
           <p:nvPr/>
         </p:nvSpPr>
@@ -7455,7 +7455,7 @@
   <p:cSld>
     <p:spTree>
       <p:nvGrpSpPr>
-        <p:cNvPr id="282" name="Shape 282"/>
+        <p:cNvPr id="280" name="Shape 280"/>
         <p:cNvGrpSpPr/>
         <p:nvPr/>
       </p:nvGrpSpPr>
@@ -7469,7 +7469,7 @@
       </p:grpSpPr>
       <p:sp>
         <p:nvSpPr>
-          <p:cNvPr id="283" name="Google Shape;283;p24"/>
+          <p:cNvPr id="281" name="Google Shape;281;p24"/>
           <p:cNvSpPr/>
           <p:nvPr/>
         </p:nvSpPr>
@@ -7536,7 +7536,7 @@
       </p:sp>
       <p:pic>
         <p:nvPicPr>
-          <p:cNvPr descr="preencoded.png" id="284" name="Google Shape;284;p24"/>
+          <p:cNvPr descr="preencoded.png" id="282" name="Google Shape;282;p24"/>
           <p:cNvPicPr preferRelativeResize="0"/>
           <p:nvPr/>
         </p:nvPicPr>
@@ -7563,7 +7563,7 @@
       </p:pic>
       <p:pic>
         <p:nvPicPr>
-          <p:cNvPr descr="preencoded.png" id="285" name="Google Shape;285;p24"/>
+          <p:cNvPr descr="preencoded.png" id="283" name="Google Shape;283;p24"/>
           <p:cNvPicPr preferRelativeResize="0"/>
           <p:nvPr/>
         </p:nvPicPr>
@@ -7590,7 +7590,7 @@
       </p:pic>
       <p:sp>
         <p:nvSpPr>
-          <p:cNvPr id="286" name="Google Shape;286;p24"/>
+          <p:cNvPr id="284" name="Google Shape;284;p24"/>
           <p:cNvSpPr/>
           <p:nvPr/>
         </p:nvSpPr>
@@ -7648,7 +7648,7 @@
       </p:sp>
       <p:pic>
         <p:nvPicPr>
-          <p:cNvPr descr="preencoded.png" id="287" name="Google Shape;287;p24"/>
+          <p:cNvPr descr="preencoded.png" id="285" name="Google Shape;285;p24"/>
           <p:cNvPicPr preferRelativeResize="0"/>
           <p:nvPr/>
         </p:nvPicPr>
@@ -7675,7 +7675,7 @@
       </p:pic>
       <p:sp>
         <p:nvSpPr>
-          <p:cNvPr id="288" name="Google Shape;288;p24"/>
+          <p:cNvPr id="286" name="Google Shape;286;p24"/>
           <p:cNvSpPr/>
           <p:nvPr/>
         </p:nvSpPr>
@@ -7733,7 +7733,7 @@
       </p:sp>
       <p:pic>
         <p:nvPicPr>
-          <p:cNvPr descr="preencoded.png" id="289" name="Google Shape;289;p24"/>
+          <p:cNvPr descr="preencoded.png" id="287" name="Google Shape;287;p24"/>
           <p:cNvPicPr preferRelativeResize="0"/>
           <p:nvPr/>
         </p:nvPicPr>
@@ -7760,7 +7760,7 @@
       </p:pic>
       <p:sp>
         <p:nvSpPr>
-          <p:cNvPr id="290" name="Google Shape;290;p24"/>
+          <p:cNvPr id="288" name="Google Shape;288;p24"/>
           <p:cNvSpPr/>
           <p:nvPr/>
         </p:nvSpPr>
@@ -7818,7 +7818,7 @@
       </p:sp>
       <p:pic>
         <p:nvPicPr>
-          <p:cNvPr descr="preencoded.png" id="291" name="Google Shape;291;p24"/>
+          <p:cNvPr descr="preencoded.png" id="289" name="Google Shape;289;p24"/>
           <p:cNvPicPr preferRelativeResize="0"/>
           <p:nvPr/>
         </p:nvPicPr>
@@ -7845,7 +7845,7 @@
       </p:pic>
       <p:sp>
         <p:nvSpPr>
-          <p:cNvPr id="292" name="Google Shape;292;p24"/>
+          <p:cNvPr id="290" name="Google Shape;290;p24"/>
           <p:cNvSpPr/>
           <p:nvPr/>
         </p:nvSpPr>
@@ -7915,7 +7915,7 @@
       </p:sp>
       <p:sp>
         <p:nvSpPr>
-          <p:cNvPr id="293" name="Google Shape;293;p24"/>
+          <p:cNvPr id="291" name="Google Shape;291;p24"/>
           <p:cNvSpPr/>
           <p:nvPr/>
         </p:nvSpPr>
@@ -7960,7 +7960,7 @@
       </p:sp>
       <p:pic>
         <p:nvPicPr>
-          <p:cNvPr descr="preencoded.png" id="294" name="Google Shape;294;p24"/>
+          <p:cNvPr descr="preencoded.png" id="292" name="Google Shape;292;p24"/>
           <p:cNvPicPr preferRelativeResize="0"/>
           <p:nvPr/>
         </p:nvPicPr>
@@ -7987,7 +7987,7 @@
       </p:pic>
       <p:sp>
         <p:nvSpPr>
-          <p:cNvPr id="295" name="Google Shape;295;p24"/>
+          <p:cNvPr id="293" name="Google Shape;293;p24"/>
           <p:cNvSpPr/>
           <p:nvPr/>
         </p:nvSpPr>
@@ -8054,7 +8054,7 @@
       </p:sp>
       <p:sp>
         <p:nvSpPr>
-          <p:cNvPr id="296" name="Google Shape;296;p24"/>
+          <p:cNvPr id="294" name="Google Shape;294;p24"/>
           <p:cNvSpPr/>
           <p:nvPr/>
         </p:nvSpPr>
@@ -8133,7 +8133,7 @@
       </p:sp>
       <p:sp>
         <p:nvSpPr>
-          <p:cNvPr id="297" name="Google Shape;297;p24"/>
+          <p:cNvPr id="295" name="Google Shape;295;p24"/>
           <p:cNvSpPr/>
           <p:nvPr/>
         </p:nvSpPr>
@@ -8182,7 +8182,7 @@
       </p:sp>
       <p:sp>
         <p:nvSpPr>
-          <p:cNvPr id="298" name="Google Shape;298;p24"/>
+          <p:cNvPr id="296" name="Google Shape;296;p24"/>
           <p:cNvSpPr/>
           <p:nvPr/>
         </p:nvSpPr>
@@ -8225,7 +8225,7 @@
       </p:sp>
       <p:pic>
         <p:nvPicPr>
-          <p:cNvPr descr="D-171] 공부 끝 - 오르비" id="299" name="Google Shape;299;p24"/>
+          <p:cNvPr descr="D-171] 공부 끝 - 오르비" id="297" name="Google Shape;297;p24"/>
           <p:cNvPicPr preferRelativeResize="0"/>
           <p:nvPr/>
         </p:nvPicPr>
@@ -8252,7 +8252,7 @@
       </p:pic>
       <p:pic>
         <p:nvPicPr>
-          <p:cNvPr descr="D-171] 공부 끝 - 오르비" id="300" name="Google Shape;300;p24"/>
+          <p:cNvPr descr="D-171] 공부 끝 - 오르비" id="298" name="Google Shape;298;p24"/>
           <p:cNvPicPr preferRelativeResize="0"/>
           <p:nvPr/>
         </p:nvPicPr>
@@ -8279,7 +8279,7 @@
       </p:pic>
       <p:pic>
         <p:nvPicPr>
-          <p:cNvPr descr="D-171] 공부 끝 - 오르비" id="301" name="Google Shape;301;p24"/>
+          <p:cNvPr descr="D-171] 공부 끝 - 오르비" id="299" name="Google Shape;299;p24"/>
           <p:cNvPicPr preferRelativeResize="0"/>
           <p:nvPr/>
         </p:nvPicPr>
@@ -8306,7 +8306,7 @@
       </p:pic>
       <p:pic>
         <p:nvPicPr>
-          <p:cNvPr descr="D-171] 공부 끝 - 오르비" id="302" name="Google Shape;302;p24"/>
+          <p:cNvPr descr="D-171] 공부 끝 - 오르비" id="300" name="Google Shape;300;p24"/>
           <p:cNvPicPr preferRelativeResize="0"/>
           <p:nvPr/>
         </p:nvPicPr>
@@ -8333,7 +8333,7 @@
       </p:pic>
       <p:pic>
         <p:nvPicPr>
-          <p:cNvPr id="303" name="Google Shape;303;p24"/>
+          <p:cNvPr id="301" name="Google Shape;301;p24"/>
           <p:cNvPicPr preferRelativeResize="0"/>
           <p:nvPr/>
         </p:nvPicPr>
@@ -8371,7 +8371,7 @@
   <p:cSld>
     <p:spTree>
       <p:nvGrpSpPr>
-        <p:cNvPr id="308" name="Shape 308"/>
+        <p:cNvPr id="306" name="Shape 306"/>
         <p:cNvGrpSpPr/>
         <p:nvPr/>
       </p:nvGrpSpPr>
@@ -8385,7 +8385,7 @@
       </p:grpSpPr>
       <p:sp>
         <p:nvSpPr>
-          <p:cNvPr id="309" name="Google Shape;309;p25"/>
+          <p:cNvPr id="307" name="Google Shape;307;p25"/>
           <p:cNvSpPr/>
           <p:nvPr/>
         </p:nvSpPr>
@@ -8434,7 +8434,7 @@
       </p:sp>
       <p:sp>
         <p:nvSpPr>
-          <p:cNvPr id="310" name="Google Shape;310;p25"/>
+          <p:cNvPr id="308" name="Google Shape;308;p25"/>
           <p:cNvSpPr/>
           <p:nvPr/>
         </p:nvSpPr>
@@ -8492,7 +8492,7 @@
       </p:sp>
       <p:pic>
         <p:nvPicPr>
-          <p:cNvPr descr="preencoded.png" id="311" name="Google Shape;311;p25"/>
+          <p:cNvPr descr="preencoded.png" id="309" name="Google Shape;309;p25"/>
           <p:cNvPicPr preferRelativeResize="0"/>
           <p:nvPr/>
         </p:nvPicPr>
@@ -8519,7 +8519,7 @@
       </p:pic>
       <p:sp>
         <p:nvSpPr>
-          <p:cNvPr id="312" name="Google Shape;312;p25"/>
+          <p:cNvPr id="310" name="Google Shape;310;p25"/>
           <p:cNvSpPr/>
           <p:nvPr/>
         </p:nvSpPr>
@@ -8604,7 +8604,7 @@
       </p:sp>
       <p:sp>
         <p:nvSpPr>
-          <p:cNvPr id="313" name="Google Shape;313;p25"/>
+          <p:cNvPr id="311" name="Google Shape;311;p25"/>
           <p:cNvSpPr/>
           <p:nvPr/>
         </p:nvSpPr>
@@ -8662,7 +8662,7 @@
       </p:sp>
       <p:sp>
         <p:nvSpPr>
-          <p:cNvPr id="314" name="Google Shape;314;p25"/>
+          <p:cNvPr id="312" name="Google Shape;312;p25"/>
           <p:cNvSpPr/>
           <p:nvPr/>
         </p:nvSpPr>
@@ -8720,7 +8720,7 @@
       </p:sp>
       <p:pic>
         <p:nvPicPr>
-          <p:cNvPr descr="preencoded.png" id="315" name="Google Shape;315;p25"/>
+          <p:cNvPr descr="preencoded.png" id="313" name="Google Shape;313;p25"/>
           <p:cNvPicPr preferRelativeResize="0"/>
           <p:nvPr/>
         </p:nvPicPr>
@@ -8747,7 +8747,7 @@
       </p:pic>
       <p:sp>
         <p:nvSpPr>
-          <p:cNvPr id="316" name="Google Shape;316;p25"/>
+          <p:cNvPr id="314" name="Google Shape;314;p25"/>
           <p:cNvSpPr/>
           <p:nvPr/>
         </p:nvSpPr>
@@ -8805,7 +8805,7 @@
       </p:sp>
       <p:sp>
         <p:nvSpPr>
-          <p:cNvPr id="317" name="Google Shape;317;p25"/>
+          <p:cNvPr id="315" name="Google Shape;315;p25"/>
           <p:cNvSpPr/>
           <p:nvPr/>
         </p:nvSpPr>
@@ -8863,7 +8863,7 @@
       </p:sp>
       <p:sp>
         <p:nvSpPr>
-          <p:cNvPr id="318" name="Google Shape;318;p25"/>
+          <p:cNvPr id="316" name="Google Shape;316;p25"/>
           <p:cNvSpPr/>
           <p:nvPr/>
         </p:nvSpPr>
@@ -8921,7 +8921,7 @@
       </p:sp>
       <p:pic>
         <p:nvPicPr>
-          <p:cNvPr descr="preencoded.png" id="319" name="Google Shape;319;p25"/>
+          <p:cNvPr descr="preencoded.png" id="317" name="Google Shape;317;p25"/>
           <p:cNvPicPr preferRelativeResize="0"/>
           <p:nvPr/>
         </p:nvPicPr>
@@ -8948,7 +8948,7 @@
       </p:pic>
       <p:sp>
         <p:nvSpPr>
-          <p:cNvPr id="320" name="Google Shape;320;p25"/>
+          <p:cNvPr id="318" name="Google Shape;318;p25"/>
           <p:cNvSpPr/>
           <p:nvPr/>
         </p:nvSpPr>
@@ -9006,7 +9006,7 @@
       </p:sp>
       <p:sp>
         <p:nvSpPr>
-          <p:cNvPr id="321" name="Google Shape;321;p25"/>
+          <p:cNvPr id="319" name="Google Shape;319;p25"/>
           <p:cNvSpPr/>
           <p:nvPr/>
         </p:nvSpPr>
@@ -9056,7 +9056,7 @@
       </p:sp>
       <p:sp>
         <p:nvSpPr>
-          <p:cNvPr id="322" name="Google Shape;322;p25"/>
+          <p:cNvPr id="320" name="Google Shape;320;p25"/>
           <p:cNvSpPr/>
           <p:nvPr/>
         </p:nvSpPr>
@@ -9106,7 +9106,7 @@
       </p:sp>
       <p:sp>
         <p:nvSpPr>
-          <p:cNvPr id="323" name="Google Shape;323;p25"/>
+          <p:cNvPr id="321" name="Google Shape;321;p25"/>
           <p:cNvSpPr/>
           <p:nvPr/>
         </p:nvSpPr>
@@ -9149,7 +9149,7 @@
       </p:sp>
       <p:pic>
         <p:nvPicPr>
-          <p:cNvPr descr="D-171] 공부 끝 - 오르비" id="324" name="Google Shape;324;p25"/>
+          <p:cNvPr descr="D-171] 공부 끝 - 오르비" id="322" name="Google Shape;322;p25"/>
           <p:cNvPicPr preferRelativeResize="0"/>
           <p:nvPr/>
         </p:nvPicPr>
@@ -9217,7 +9217,7 @@
     </p:bg>
     <p:spTree>
       <p:nvGrpSpPr>
-        <p:cNvPr id="328" name="Shape 328"/>
+        <p:cNvPr id="326" name="Shape 326"/>
         <p:cNvGrpSpPr/>
         <p:nvPr/>
       </p:nvGrpSpPr>
@@ -9231,7 +9231,7 @@
       </p:grpSpPr>
       <p:pic>
         <p:nvPicPr>
-          <p:cNvPr descr="D-171] 공부 끝 - 오르비" id="329" name="Google Shape;329;p26"/>
+          <p:cNvPr descr="D-171] 공부 끝 - 오르비" id="327" name="Google Shape;327;p26"/>
           <p:cNvPicPr preferRelativeResize="0"/>
           <p:nvPr/>
         </p:nvPicPr>
@@ -9258,7 +9258,7 @@
       </p:pic>
       <p:sp>
         <p:nvSpPr>
-          <p:cNvPr id="330" name="Google Shape;330;p26"/>
+          <p:cNvPr id="328" name="Google Shape;328;p26"/>
           <p:cNvSpPr/>
           <p:nvPr/>
         </p:nvSpPr>
@@ -9400,7 +9400,7 @@
       </p:sp>
       <p:pic>
         <p:nvPicPr>
-          <p:cNvPr descr="D-171] 공부 끝 - 오르비" id="331" name="Google Shape;331;p26"/>
+          <p:cNvPr descr="D-171] 공부 끝 - 오르비" id="329" name="Google Shape;329;p26"/>
           <p:cNvPicPr preferRelativeResize="0"/>
           <p:nvPr/>
         </p:nvPicPr>
@@ -9427,7 +9427,7 @@
       </p:pic>
       <p:pic>
         <p:nvPicPr>
-          <p:cNvPr descr="D-171] 공부 끝 - 오르비" id="332" name="Google Shape;332;p26"/>
+          <p:cNvPr descr="D-171] 공부 끝 - 오르비" id="330" name="Google Shape;330;p26"/>
           <p:cNvPicPr preferRelativeResize="0"/>
           <p:nvPr/>
         </p:nvPicPr>
@@ -9454,7 +9454,7 @@
       </p:pic>
       <p:pic>
         <p:nvPicPr>
-          <p:cNvPr descr="D-171] 공부 끝 - 오르비" id="333" name="Google Shape;333;p26"/>
+          <p:cNvPr descr="D-171] 공부 끝 - 오르비" id="331" name="Google Shape;331;p26"/>
           <p:cNvPicPr preferRelativeResize="0"/>
           <p:nvPr/>
         </p:nvPicPr>
@@ -9481,7 +9481,7 @@
       </p:pic>
       <p:pic>
         <p:nvPicPr>
-          <p:cNvPr descr="D-171] 공부 끝 - 오르비" id="334" name="Google Shape;334;p26"/>
+          <p:cNvPr descr="D-171] 공부 끝 - 오르비" id="332" name="Google Shape;332;p26"/>
           <p:cNvPicPr preferRelativeResize="0"/>
           <p:nvPr/>
         </p:nvPicPr>
@@ -9508,7 +9508,7 @@
       </p:pic>
       <p:pic>
         <p:nvPicPr>
-          <p:cNvPr descr="D-171] 공부 끝 - 오르비" id="335" name="Google Shape;335;p26"/>
+          <p:cNvPr descr="D-171] 공부 끝 - 오르비" id="333" name="Google Shape;333;p26"/>
           <p:cNvPicPr preferRelativeResize="0"/>
           <p:nvPr/>
         </p:nvPicPr>
@@ -9535,7 +9535,7 @@
       </p:pic>
       <p:pic>
         <p:nvPicPr>
-          <p:cNvPr descr="D-171] 공부 끝 - 오르비" id="336" name="Google Shape;336;p26"/>
+          <p:cNvPr descr="D-171] 공부 끝 - 오르비" id="334" name="Google Shape;334;p26"/>
           <p:cNvPicPr preferRelativeResize="0"/>
           <p:nvPr/>
         </p:nvPicPr>
@@ -9562,7 +9562,7 @@
       </p:pic>
       <p:pic>
         <p:nvPicPr>
-          <p:cNvPr descr="D-171] 공부 끝 - 오르비" id="337" name="Google Shape;337;p26"/>
+          <p:cNvPr descr="D-171] 공부 끝 - 오르비" id="335" name="Google Shape;335;p26"/>
           <p:cNvPicPr preferRelativeResize="0"/>
           <p:nvPr/>
         </p:nvPicPr>
@@ -9589,7 +9589,7 @@
       </p:pic>
       <p:pic>
         <p:nvPicPr>
-          <p:cNvPr descr="D-171] 공부 끝 - 오르비" id="338" name="Google Shape;338;p26"/>
+          <p:cNvPr descr="D-171] 공부 끝 - 오르비" id="336" name="Google Shape;336;p26"/>
           <p:cNvPicPr preferRelativeResize="0"/>
           <p:nvPr/>
         </p:nvPicPr>
@@ -9616,7 +9616,7 @@
       </p:pic>
       <p:pic>
         <p:nvPicPr>
-          <p:cNvPr descr="D-171] 공부 끝 - 오르비" id="339" name="Google Shape;339;p26"/>
+          <p:cNvPr descr="D-171] 공부 끝 - 오르비" id="337" name="Google Shape;337;p26"/>
           <p:cNvPicPr preferRelativeResize="0"/>
           <p:nvPr/>
         </p:nvPicPr>
@@ -9643,7 +9643,7 @@
       </p:pic>
       <p:pic>
         <p:nvPicPr>
-          <p:cNvPr descr="D-171] 공부 끝 - 오르비" id="340" name="Google Shape;340;p26"/>
+          <p:cNvPr descr="D-171] 공부 끝 - 오르비" id="338" name="Google Shape;338;p26"/>
           <p:cNvPicPr preferRelativeResize="0"/>
           <p:nvPr/>
         </p:nvPicPr>
@@ -9670,7 +9670,7 @@
       </p:pic>
       <p:pic>
         <p:nvPicPr>
-          <p:cNvPr descr="D-171] 공부 끝 - 오르비" id="341" name="Google Shape;341;p26"/>
+          <p:cNvPr descr="D-171] 공부 끝 - 오르비" id="339" name="Google Shape;339;p26"/>
           <p:cNvPicPr preferRelativeResize="0"/>
           <p:nvPr/>
         </p:nvPicPr>
@@ -9697,7 +9697,7 @@
       </p:pic>
       <p:pic>
         <p:nvPicPr>
-          <p:cNvPr descr="D-171] 공부 끝 - 오르비" id="342" name="Google Shape;342;p26"/>
+          <p:cNvPr descr="D-171] 공부 끝 - 오르비" id="340" name="Google Shape;340;p26"/>
           <p:cNvPicPr preferRelativeResize="0"/>
           <p:nvPr/>
         </p:nvPicPr>
@@ -9724,7 +9724,7 @@
       </p:pic>
       <p:pic>
         <p:nvPicPr>
-          <p:cNvPr descr="D-171] 공부 끝 - 오르비" id="343" name="Google Shape;343;p26"/>
+          <p:cNvPr descr="D-171] 공부 끝 - 오르비" id="341" name="Google Shape;341;p26"/>
           <p:cNvPicPr preferRelativeResize="0"/>
           <p:nvPr/>
         </p:nvPicPr>
@@ -9751,7 +9751,7 @@
       </p:pic>
       <p:pic>
         <p:nvPicPr>
-          <p:cNvPr id="344" name="Google Shape;344;p26"/>
+          <p:cNvPr id="342" name="Google Shape;342;p26"/>
           <p:cNvPicPr preferRelativeResize="0"/>
           <p:nvPr/>
         </p:nvPicPr>
@@ -9778,7 +9778,7 @@
       </p:pic>
       <p:pic>
         <p:nvPicPr>
-          <p:cNvPr id="345" name="Google Shape;345;p26"/>
+          <p:cNvPr id="343" name="Google Shape;343;p26"/>
           <p:cNvPicPr preferRelativeResize="0"/>
           <p:nvPr/>
         </p:nvPicPr>
@@ -16755,7 +16755,7 @@
                 <a:cs typeface="Inter"/>
                 <a:sym typeface="Inter"/>
               </a:rPr>
-              <a:t>여기 뭐추가해아할지 모르겟음</a:t>
+              <a:t>진행 중</a:t>
             </a:r>
             <a:endParaRPr b="0" i="0" sz="1600" u="none" cap="none" strike="noStrike"/>
           </a:p>
@@ -16769,106 +16769,8 @@
         </p:nvSpPr>
         <p:spPr>
           <a:xfrm>
-            <a:off x="7573327" y="4570928"/>
-            <a:ext cx="6345900" cy="328500"/>
-          </a:xfrm>
-          <a:prstGeom prst="rect">
-            <a:avLst/>
-          </a:prstGeom>
-          <a:noFill/>
-          <a:ln>
-            <a:noFill/>
-          </a:ln>
-        </p:spPr>
-        <p:txBody>
-          <a:bodyPr anchorCtr="0" anchor="t" bIns="0" lIns="0" spcFirstLastPara="1" rIns="0" wrap="square" tIns="0">
-            <a:noAutofit/>
-          </a:bodyPr>
-          <a:lstStyle/>
-          <a:p>
-            <a:pPr indent="-342900" lvl="0" marL="342900" marR="0" rtl="0" algn="l">
-              <a:lnSpc>
-                <a:spcPct val="159375"/>
-              </a:lnSpc>
-              <a:spcBef>
-                <a:spcPts val="0"/>
-              </a:spcBef>
-              <a:spcAft>
-                <a:spcPts val="0"/>
-              </a:spcAft>
-              <a:buClr>
-                <a:srgbClr val="272525"/>
-              </a:buClr>
-              <a:buSzPts val="1600"/>
-              <a:buFont typeface="Inter"/>
-              <a:buChar char="•"/>
-            </a:pPr>
-            <a:r>
-              <a:t/>
-            </a:r>
-            <a:endParaRPr b="0" i="0" sz="1600" u="none" cap="none" strike="noStrike"/>
-          </a:p>
-        </p:txBody>
-      </p:sp>
-      <p:sp>
-        <p:nvSpPr>
-          <p:cNvPr id="240" name="Google Shape;240;p22"/>
-          <p:cNvSpPr/>
-          <p:nvPr/>
-        </p:nvSpPr>
-        <p:spPr>
-          <a:xfrm>
-            <a:off x="7573327" y="4971336"/>
-            <a:ext cx="6345900" cy="328500"/>
-          </a:xfrm>
-          <a:prstGeom prst="rect">
-            <a:avLst/>
-          </a:prstGeom>
-          <a:noFill/>
-          <a:ln>
-            <a:noFill/>
-          </a:ln>
-        </p:spPr>
-        <p:txBody>
-          <a:bodyPr anchorCtr="0" anchor="t" bIns="0" lIns="0" spcFirstLastPara="1" rIns="0" wrap="square" tIns="0">
-            <a:noAutofit/>
-          </a:bodyPr>
-          <a:lstStyle/>
-          <a:p>
-            <a:pPr indent="-342900" lvl="0" marL="342900" marR="0" rtl="0" algn="l">
-              <a:lnSpc>
-                <a:spcPct val="159375"/>
-              </a:lnSpc>
-              <a:spcBef>
-                <a:spcPts val="0"/>
-              </a:spcBef>
-              <a:spcAft>
-                <a:spcPts val="0"/>
-              </a:spcAft>
-              <a:buClr>
-                <a:srgbClr val="272525"/>
-              </a:buClr>
-              <a:buSzPts val="1600"/>
-              <a:buFont typeface="Inter"/>
-              <a:buChar char="•"/>
-            </a:pPr>
-            <a:r>
-              <a:t/>
-            </a:r>
-            <a:endParaRPr b="0" i="0" sz="1600" u="none" cap="none" strike="noStrike"/>
-          </a:p>
-        </p:txBody>
-      </p:sp>
-      <p:sp>
-        <p:nvSpPr>
-          <p:cNvPr id="241" name="Google Shape;241;p22"/>
-          <p:cNvSpPr/>
-          <p:nvPr/>
-        </p:nvSpPr>
-        <p:spPr>
-          <a:xfrm>
-            <a:off x="7573327" y="5484733"/>
-            <a:ext cx="6346031" cy="336233"/>
+            <a:off x="7573264" y="4570908"/>
+            <a:ext cx="6345900" cy="336300"/>
           </a:xfrm>
           <a:prstGeom prst="rect">
             <a:avLst/>
@@ -16919,7 +16821,7 @@
       </p:sp>
       <p:sp>
         <p:nvSpPr>
-          <p:cNvPr id="242" name="Google Shape;242;p22"/>
+          <p:cNvPr id="240" name="Google Shape;240;p22"/>
           <p:cNvSpPr/>
           <p:nvPr/>
         </p:nvSpPr>
@@ -16968,7 +16870,7 @@
       </p:sp>
       <p:sp>
         <p:nvSpPr>
-          <p:cNvPr id="243" name="Google Shape;243;p22"/>
+          <p:cNvPr id="241" name="Google Shape;241;p22"/>
           <p:cNvSpPr/>
           <p:nvPr/>
         </p:nvSpPr>
@@ -17011,7 +16913,7 @@
       </p:sp>
       <p:pic>
         <p:nvPicPr>
-          <p:cNvPr descr="D-171] 공부 끝 - 오르비" id="244" name="Google Shape;244;p22"/>
+          <p:cNvPr descr="D-171] 공부 끝 - 오르비" id="242" name="Google Shape;242;p22"/>
           <p:cNvPicPr preferRelativeResize="0"/>
           <p:nvPr/>
         </p:nvPicPr>
@@ -17038,7 +16940,7 @@
       </p:pic>
       <p:pic>
         <p:nvPicPr>
-          <p:cNvPr id="245" name="Google Shape;245;p22"/>
+          <p:cNvPr id="243" name="Google Shape;243;p22"/>
           <p:cNvPicPr preferRelativeResize="0"/>
           <p:nvPr/>
         </p:nvPicPr>
@@ -17065,7 +16967,7 @@
       </p:pic>
       <p:pic>
         <p:nvPicPr>
-          <p:cNvPr id="246" name="Google Shape;246;p22"/>
+          <p:cNvPr id="244" name="Google Shape;244;p22"/>
           <p:cNvPicPr preferRelativeResize="0"/>
           <p:nvPr/>
         </p:nvPicPr>
